--- a/curriculum-planner/template/心創力課程規劃簡報_模板.pptx
+++ b/curriculum-planner/template/心創力課程規劃簡報_模板.pptx
@@ -1418,7 +1418,7 @@
           <p:nvPr/>
         </p:nvPicPr>
         <p:blipFill>
-          <a:blip r:embed="rId1"/>
+          <a:blip r:embed="rId5"/>
           <a:stretch>
             <a:fillRect/>
           </a:stretch>
@@ -1426,52 +1426,13 @@
         <p:spPr>
           <a:xfrm>
             <a:off x="777240" y="1042416"/>
-            <a:ext cx="289923" cy="402336"/>
+            <a:ext cx="943817" cy="457200"/>
           </a:xfrm>
           <a:prstGeom prst="rect">
             <a:avLst/>
           </a:prstGeom>
         </p:spPr>
       </p:pic>
-      <p:sp>
-        <p:nvSpPr>
-          <p:cNvPr id="3" name="Text 0"/>
-          <p:cNvSpPr/>
-          <p:nvPr/>
-        </p:nvSpPr>
-        <p:spPr>
-          <a:xfrm>
-            <a:off x="1176891" y="1060704"/>
-            <a:ext cx="5486400" cy="365760"/>
-          </a:xfrm>
-          <a:prstGeom prst="rect">
-            <a:avLst/>
-          </a:prstGeom>
-          <a:noFill/>
-          <a:ln/>
-        </p:spPr>
-        <p:txBody>
-          <a:bodyPr wrap="square" lIns="0" tIns="0" rIns="0" bIns="0" rtlCol="0" anchor="ctr"/>
-          <a:lstStyle/>
-          <a:p>
-            <a:pPr indent="0" marL="0">
-              <a:buNone/>
-            </a:pPr>
-            <a:r>
-              <a:rPr lang="en-US" sz="1300" b="1" dirty="0">
-                <a:solidFill>
-                  <a:srgbClr val="37474F"/>
-                </a:solidFill>
-                <a:latin typeface="Microsoft JhengHei" pitchFamily="34" charset="0"/>
-                <a:ea typeface="Microsoft JhengHei" pitchFamily="34" charset="-122"/>
-                <a:cs typeface="Microsoft JhengHei" pitchFamily="34" charset="-120"/>
-              </a:rPr>
-              <a:t>財團法人立賢教育基金會</a:t>
-            </a:r>
-            <a:endParaRPr lang="en-US" sz="1300" dirty="0"/>
-          </a:p>
-        </p:txBody>
-      </p:sp>
       <p:sp>
         <p:nvSpPr>
           <p:cNvPr id="4" name="Text 1"/>
@@ -2003,174 +1964,6 @@
           </a:p>
         </p:txBody>
       </p:sp>
-      <p:sp>
-        <p:nvSpPr>
-          <p:cNvPr id="18" name="Shape 15"/>
-          <p:cNvSpPr/>
-          <p:nvPr/>
-        </p:nvSpPr>
-        <p:spPr>
-          <a:xfrm>
-            <a:off x="8503920" y="1463040"/>
-            <a:ext cx="1828800" cy="1828800"/>
-          </a:xfrm>
-          <a:prstGeom prst="ellipse">
-            <a:avLst/>
-          </a:prstGeom>
-          <a:solidFill>
-            <a:srgbClr val="2E9D8E"/>
-          </a:solidFill>
-          <a:ln/>
-        </p:spPr>
-        <p:txBody>
-          <a:bodyPr/>
-          <a:p/>
-        </p:txBody>
-      </p:sp>
-      <p:sp>
-        <p:nvSpPr>
-          <p:cNvPr id="19" name="Shape 16"/>
-          <p:cNvSpPr/>
-          <p:nvPr/>
-        </p:nvSpPr>
-        <p:spPr>
-          <a:xfrm>
-            <a:off x="9875520" y="2011680"/>
-            <a:ext cx="1554480" cy="1554480"/>
-          </a:xfrm>
-          <a:prstGeom prst="ellipse">
-            <a:avLst/>
-          </a:prstGeom>
-          <a:solidFill>
-            <a:srgbClr val="3A7CA5"/>
-          </a:solidFill>
-          <a:ln/>
-        </p:spPr>
-        <p:txBody>
-          <a:bodyPr/>
-          <a:p/>
-        </p:txBody>
-      </p:sp>
-      <p:sp>
-        <p:nvSpPr>
-          <p:cNvPr id="20" name="Shape 17"/>
-          <p:cNvSpPr/>
-          <p:nvPr/>
-        </p:nvSpPr>
-        <p:spPr>
-          <a:xfrm>
-            <a:off x="8229600" y="3017520"/>
-            <a:ext cx="1645920" cy="1645920"/>
-          </a:xfrm>
-          <a:prstGeom prst="ellipse">
-            <a:avLst/>
-          </a:prstGeom>
-          <a:solidFill>
-            <a:srgbClr val="E8623C"/>
-          </a:solidFill>
-          <a:ln/>
-        </p:spPr>
-        <p:txBody>
-          <a:bodyPr/>
-          <a:p/>
-        </p:txBody>
-      </p:sp>
-      <p:sp>
-        <p:nvSpPr>
-          <p:cNvPr id="21" name="Shape 18"/>
-          <p:cNvSpPr/>
-          <p:nvPr/>
-        </p:nvSpPr>
-        <p:spPr>
-          <a:xfrm>
-            <a:off x="9784080" y="3566160"/>
-            <a:ext cx="1828800" cy="1828800"/>
-          </a:xfrm>
-          <a:prstGeom prst="ellipse">
-            <a:avLst/>
-          </a:prstGeom>
-          <a:solidFill>
-            <a:srgbClr val="F1C232"/>
-          </a:solidFill>
-          <a:ln/>
-        </p:spPr>
-        <p:txBody>
-          <a:bodyPr/>
-          <a:p/>
-        </p:txBody>
-      </p:sp>
-      <p:sp>
-        <p:nvSpPr>
-          <p:cNvPr id="22" name="Shape 19"/>
-          <p:cNvSpPr/>
-          <p:nvPr/>
-        </p:nvSpPr>
-        <p:spPr>
-          <a:xfrm>
-            <a:off x="8778240" y="4206240"/>
-            <a:ext cx="1371600" cy="1371600"/>
-          </a:xfrm>
-          <a:prstGeom prst="ellipse">
-            <a:avLst/>
-          </a:prstGeom>
-          <a:solidFill>
-            <a:srgbClr val="E07A9B"/>
-          </a:solidFill>
-          <a:ln/>
-        </p:spPr>
-        <p:txBody>
-          <a:bodyPr/>
-          <a:p/>
-        </p:txBody>
-      </p:sp>
-      <p:sp>
-        <p:nvSpPr>
-          <p:cNvPr id="23" name="Shape 20"/>
-          <p:cNvSpPr/>
-          <p:nvPr/>
-        </p:nvSpPr>
-        <p:spPr>
-          <a:xfrm>
-            <a:off x="10332720" y="1371600"/>
-            <a:ext cx="822960" cy="822960"/>
-          </a:xfrm>
-          <a:prstGeom prst="ellipse">
-            <a:avLst/>
-          </a:prstGeom>
-          <a:solidFill>
-            <a:srgbClr val="37474F"/>
-          </a:solidFill>
-          <a:ln/>
-        </p:spPr>
-        <p:txBody>
-          <a:bodyPr/>
-          <a:p/>
-        </p:txBody>
-      </p:sp>
-      <p:pic>
-        <p:nvPicPr>
-          <p:cNvPr id="24" name="Image 1" descr="preencoded.png">    </p:cNvPr>
-          <p:cNvPicPr>
-            <a:picLocks noChangeAspect="1"/>
-          </p:cNvPicPr>
-          <p:nvPr/>
-        </p:nvPicPr>
-        <p:blipFill>
-          <a:blip r:embed="rId2"/>
-          <a:stretch>
-            <a:fillRect/>
-          </a:stretch>
-        </p:blipFill>
-        <p:spPr>
-          <a:xfrm>
-            <a:off x="9464040" y="2788920"/>
-            <a:ext cx="658917" cy="914400"/>
-          </a:xfrm>
-          <a:prstGeom prst="rect">
-            <a:avLst/>
-          </a:prstGeom>
-        </p:spPr>
-      </p:pic>
       <p:sp>
         <p:nvSpPr>
           <p:cNvPr id="26" name="Text 22"/>
@@ -2251,7 +2044,7 @@
           <p:nvPr/>
         </p:nvPicPr>
         <p:blipFill>
-          <a:blip r:embed="rId1"/>
+          <a:blip r:embed="rId9"/>
           <a:stretch>
             <a:fillRect/>
           </a:stretch>
@@ -2259,7 +2052,7 @@
         <p:spPr>
           <a:xfrm>
             <a:off x="566928" y="402336"/>
-            <a:ext cx="342637" cy="475488"/>
+            <a:ext cx="398364" cy="475488"/>
           </a:xfrm>
           <a:prstGeom prst="rect">
             <a:avLst/>
@@ -3293,7 +3086,7 @@
           <p:nvPr/>
         </p:nvPicPr>
         <p:blipFill>
-          <a:blip r:embed="rId1"/>
+          <a:blip r:embed="rId7"/>
           <a:stretch>
             <a:fillRect/>
           </a:stretch>
@@ -3301,7 +3094,7 @@
         <p:spPr>
           <a:xfrm>
             <a:off x="566928" y="402336"/>
-            <a:ext cx="342637" cy="475488"/>
+            <a:ext cx="398364" cy="475488"/>
           </a:xfrm>
           <a:prstGeom prst="rect">
             <a:avLst/>
@@ -4209,7 +4002,7 @@
           <p:nvPr/>
         </p:nvPicPr>
         <p:blipFill>
-          <a:blip r:embed="rId1"/>
+          <a:blip r:embed="rId4"/>
           <a:stretch>
             <a:fillRect/>
           </a:stretch>
@@ -4217,7 +4010,7 @@
         <p:spPr>
           <a:xfrm>
             <a:off x="566928" y="402336"/>
-            <a:ext cx="342637" cy="475488"/>
+            <a:ext cx="398364" cy="475488"/>
           </a:xfrm>
           <a:prstGeom prst="rect">
             <a:avLst/>
@@ -6162,7 +5955,7 @@
           <p:nvPr/>
         </p:nvPicPr>
         <p:blipFill>
-          <a:blip r:embed="rId1"/>
+          <a:blip r:embed="rId6"/>
           <a:stretch>
             <a:fillRect/>
           </a:stretch>
@@ -6170,7 +5963,7 @@
         <p:spPr>
           <a:xfrm>
             <a:off x="566928" y="402336"/>
-            <a:ext cx="342637" cy="475488"/>
+            <a:ext cx="398364" cy="475488"/>
           </a:xfrm>
           <a:prstGeom prst="rect">
             <a:avLst/>
@@ -8127,7 +7920,7 @@
           <p:nvPr/>
         </p:nvPicPr>
         <p:blipFill>
-          <a:blip r:embed="rId1"/>
+          <a:blip r:embed="rId8"/>
           <a:stretch>
             <a:fillRect/>
           </a:stretch>
@@ -8135,7 +7928,7 @@
         <p:spPr>
           <a:xfrm>
             <a:off x="566928" y="402336"/>
-            <a:ext cx="342637" cy="475488"/>
+            <a:ext cx="398364" cy="475488"/>
           </a:xfrm>
           <a:prstGeom prst="rect">
             <a:avLst/>
@@ -9351,7 +9144,7 @@
           <p:nvPr/>
         </p:nvPicPr>
         <p:blipFill>
-          <a:blip r:embed="rId1"/>
+          <a:blip r:embed="rId7"/>
           <a:stretch>
             <a:fillRect/>
           </a:stretch>
@@ -9359,7 +9152,7 @@
         <p:spPr>
           <a:xfrm>
             <a:off x="566928" y="402336"/>
-            <a:ext cx="342637" cy="475488"/>
+            <a:ext cx="398364" cy="475488"/>
           </a:xfrm>
           <a:prstGeom prst="rect">
             <a:avLst/>

--- a/curriculum-planner/template/心創力課程規劃簡報_模板.pptx
+++ b/curriculum-planner/template/心創力課程規劃簡報_模板.pptx
@@ -1428,8 +1428,10 @@
             <a:off x="777240" y="1042416"/>
             <a:ext cx="943817" cy="457200"/>
           </a:xfrm>
-          <a:prstGeom prst="rect">
-            <a:avLst/>
+          <a:prstGeom prst="roundRect">
+            <a:avLst>
+              <a:gd name="adj" fmla="val 16000"/>
+            </a:avLst>
           </a:prstGeom>
         </p:spPr>
       </p:pic>
@@ -1444,8 +1446,10 @@
             <a:off x="777240" y="1627632"/>
             <a:ext cx="6400800" cy="365760"/>
           </a:xfrm>
-          <a:prstGeom prst="rect">
-            <a:avLst/>
+          <a:prstGeom prst="roundRect">
+            <a:avLst>
+              <a:gd name="adj" fmla="val 16000"/>
+            </a:avLst>
           </a:prstGeom>
           <a:noFill/>
           <a:ln/>
@@ -1483,8 +1487,10 @@
             <a:off x="758952" y="2240280"/>
             <a:ext cx="6766560" cy="1371600"/>
           </a:xfrm>
-          <a:prstGeom prst="rect">
-            <a:avLst/>
+          <a:prstGeom prst="roundRect">
+            <a:avLst>
+              <a:gd name="adj" fmla="val 6000"/>
+            </a:avLst>
           </a:prstGeom>
           <a:noFill/>
           <a:ln/>
@@ -1548,8 +1554,10 @@
             <a:off x="1051560" y="3977640"/>
             <a:ext cx="5943600" cy="868680"/>
           </a:xfrm>
-          <a:prstGeom prst="rect">
-            <a:avLst/>
+          <a:prstGeom prst="roundRect">
+            <a:avLst>
+              <a:gd name="adj" fmla="val 9474"/>
+            </a:avLst>
           </a:prstGeom>
           <a:noFill/>
           <a:ln/>
@@ -1648,8 +1656,10 @@
             <a:off x="777240" y="5120640"/>
             <a:ext cx="2011680" cy="457200"/>
           </a:xfrm>
-          <a:prstGeom prst="rect">
-            <a:avLst/>
+          <a:prstGeom prst="roundRect">
+            <a:avLst>
+              <a:gd name="adj" fmla="val 16000"/>
+            </a:avLst>
           </a:prstGeom>
           <a:noFill/>
           <a:ln/>
@@ -1720,8 +1730,10 @@
             <a:off x="2971800" y="5120640"/>
             <a:ext cx="2011680" cy="457200"/>
           </a:xfrm>
-          <a:prstGeom prst="rect">
-            <a:avLst/>
+          <a:prstGeom prst="roundRect">
+            <a:avLst>
+              <a:gd name="adj" fmla="val 16000"/>
+            </a:avLst>
           </a:prstGeom>
           <a:noFill/>
           <a:ln/>
@@ -1792,8 +1804,10 @@
             <a:off x="777240" y="5742432"/>
             <a:ext cx="1645920" cy="457200"/>
           </a:xfrm>
-          <a:prstGeom prst="rect">
-            <a:avLst/>
+          <a:prstGeom prst="roundRect">
+            <a:avLst>
+              <a:gd name="adj" fmla="val 16000"/>
+            </a:avLst>
           </a:prstGeom>
           <a:noFill/>
           <a:ln/>
@@ -1864,8 +1878,10 @@
             <a:off x="2560320" y="5742432"/>
             <a:ext cx="1645920" cy="457200"/>
           </a:xfrm>
-          <a:prstGeom prst="rect">
-            <a:avLst/>
+          <a:prstGeom prst="roundRect">
+            <a:avLst>
+              <a:gd name="adj" fmla="val 16000"/>
+            </a:avLst>
           </a:prstGeom>
           <a:noFill/>
           <a:ln/>
@@ -1936,8 +1952,10 @@
             <a:off x="4343400" y="5742432"/>
             <a:ext cx="1645920" cy="457200"/>
           </a:xfrm>
-          <a:prstGeom prst="rect">
-            <a:avLst/>
+          <a:prstGeom prst="roundRect">
+            <a:avLst>
+              <a:gd name="adj" fmla="val 16000"/>
+            </a:avLst>
           </a:prstGeom>
           <a:noFill/>
           <a:ln/>
@@ -1975,8 +1993,10 @@
             <a:off x="11384280" y="6455664"/>
             <a:ext cx="411480" cy="274320"/>
           </a:xfrm>
-          <a:prstGeom prst="rect">
-            <a:avLst/>
+          <a:prstGeom prst="roundRect">
+            <a:avLst>
+              <a:gd name="adj" fmla="val 16000"/>
+            </a:avLst>
           </a:prstGeom>
           <a:noFill/>
           <a:ln/>
@@ -2054,8 +2074,10 @@
             <a:off x="566928" y="402336"/>
             <a:ext cx="398364" cy="475488"/>
           </a:xfrm>
-          <a:prstGeom prst="rect">
-            <a:avLst/>
+          <a:prstGeom prst="roundRect">
+            <a:avLst>
+              <a:gd name="adj" fmla="val 16000"/>
+            </a:avLst>
           </a:prstGeom>
         </p:spPr>
       </p:pic>
@@ -2070,8 +2092,10 @@
             <a:off x="1024128" y="365760"/>
             <a:ext cx="10607040" cy="548640"/>
           </a:xfrm>
-          <a:prstGeom prst="rect">
-            <a:avLst/>
+          <a:prstGeom prst="roundRect">
+            <a:avLst>
+              <a:gd name="adj" fmla="val 15000"/>
+            </a:avLst>
           </a:prstGeom>
           <a:noFill/>
           <a:ln/>
@@ -2109,8 +2133,10 @@
             <a:off x="1024128" y="950976"/>
             <a:ext cx="10607040" cy="310896"/>
           </a:xfrm>
-          <a:prstGeom prst="rect">
-            <a:avLst/>
+          <a:prstGeom prst="roundRect">
+            <a:avLst>
+              <a:gd name="adj" fmla="val 16000"/>
+            </a:avLst>
           </a:prstGeom>
           <a:noFill/>
           <a:ln/>
@@ -2213,8 +2239,10 @@
             <a:off x="872703" y="1896831"/>
             <a:ext cx="266273" cy="266273"/>
           </a:xfrm>
-          <a:prstGeom prst="rect">
-            <a:avLst/>
+          <a:prstGeom prst="roundRect">
+            <a:avLst>
+              <a:gd name="adj" fmla="val 16000"/>
+            </a:avLst>
           </a:prstGeom>
         </p:spPr>
       </p:pic>
@@ -2229,8 +2257,10 @@
             <a:off x="1389888" y="1792224"/>
             <a:ext cx="2523744" cy="457200"/>
           </a:xfrm>
-          <a:prstGeom prst="rect">
-            <a:avLst/>
+          <a:prstGeom prst="roundRect">
+            <a:avLst>
+              <a:gd name="adj" fmla="val 16000"/>
+            </a:avLst>
           </a:prstGeom>
           <a:noFill/>
           <a:ln/>
@@ -2268,8 +2298,10 @@
             <a:off x="804672" y="2395728"/>
             <a:ext cx="3017520" cy="1097280"/>
           </a:xfrm>
-          <a:prstGeom prst="rect">
-            <a:avLst/>
+          <a:prstGeom prst="roundRect">
+            <a:avLst>
+              <a:gd name="adj" fmla="val 7500"/>
+            </a:avLst>
           </a:prstGeom>
           <a:noFill/>
           <a:ln/>
@@ -2375,8 +2407,10 @@
             <a:off x="4649175" y="1896831"/>
             <a:ext cx="266273" cy="266273"/>
           </a:xfrm>
-          <a:prstGeom prst="rect">
-            <a:avLst/>
+          <a:prstGeom prst="roundRect">
+            <a:avLst>
+              <a:gd name="adj" fmla="val 16000"/>
+            </a:avLst>
           </a:prstGeom>
         </p:spPr>
       </p:pic>
@@ -2391,8 +2425,10 @@
             <a:off x="5166360" y="1792224"/>
             <a:ext cx="2523744" cy="457200"/>
           </a:xfrm>
-          <a:prstGeom prst="rect">
-            <a:avLst/>
+          <a:prstGeom prst="roundRect">
+            <a:avLst>
+              <a:gd name="adj" fmla="val 16000"/>
+            </a:avLst>
           </a:prstGeom>
           <a:noFill/>
           <a:ln/>
@@ -2430,8 +2466,10 @@
             <a:off x="4581144" y="2395728"/>
             <a:ext cx="3017520" cy="1097280"/>
           </a:xfrm>
-          <a:prstGeom prst="rect">
-            <a:avLst/>
+          <a:prstGeom prst="roundRect">
+            <a:avLst>
+              <a:gd name="adj" fmla="val 7500"/>
+            </a:avLst>
           </a:prstGeom>
           <a:noFill/>
           <a:ln/>
@@ -2537,8 +2575,10 @@
             <a:off x="8425647" y="1896831"/>
             <a:ext cx="266273" cy="266273"/>
           </a:xfrm>
-          <a:prstGeom prst="rect">
-            <a:avLst/>
+          <a:prstGeom prst="roundRect">
+            <a:avLst>
+              <a:gd name="adj" fmla="val 16000"/>
+            </a:avLst>
           </a:prstGeom>
         </p:spPr>
       </p:pic>
@@ -2553,8 +2593,10 @@
             <a:off x="8942832" y="1792224"/>
             <a:ext cx="2523744" cy="457200"/>
           </a:xfrm>
-          <a:prstGeom prst="rect">
-            <a:avLst/>
+          <a:prstGeom prst="roundRect">
+            <a:avLst>
+              <a:gd name="adj" fmla="val 16000"/>
+            </a:avLst>
           </a:prstGeom>
           <a:noFill/>
           <a:ln/>
@@ -2592,8 +2634,10 @@
             <a:off x="8357616" y="2395728"/>
             <a:ext cx="3017520" cy="1097280"/>
           </a:xfrm>
-          <a:prstGeom prst="rect">
-            <a:avLst/>
+          <a:prstGeom prst="roundRect">
+            <a:avLst>
+              <a:gd name="adj" fmla="val 7500"/>
+            </a:avLst>
           </a:prstGeom>
           <a:noFill/>
           <a:ln/>
@@ -2699,8 +2743,10 @@
             <a:off x="872703" y="4228551"/>
             <a:ext cx="266273" cy="266273"/>
           </a:xfrm>
-          <a:prstGeom prst="rect">
-            <a:avLst/>
+          <a:prstGeom prst="roundRect">
+            <a:avLst>
+              <a:gd name="adj" fmla="val 16000"/>
+            </a:avLst>
           </a:prstGeom>
         </p:spPr>
       </p:pic>
@@ -2715,8 +2761,10 @@
             <a:off x="1389888" y="4123944"/>
             <a:ext cx="4416552" cy="457200"/>
           </a:xfrm>
-          <a:prstGeom prst="rect">
-            <a:avLst/>
+          <a:prstGeom prst="roundRect">
+            <a:avLst>
+              <a:gd name="adj" fmla="val 16000"/>
+            </a:avLst>
           </a:prstGeom>
           <a:noFill/>
           <a:ln/>
@@ -2754,8 +2802,10 @@
             <a:off x="804672" y="4727448"/>
             <a:ext cx="4910328" cy="1234440"/>
           </a:xfrm>
-          <a:prstGeom prst="rect">
-            <a:avLst/>
+          <a:prstGeom prst="roundRect">
+            <a:avLst>
+              <a:gd name="adj" fmla="val 6667"/>
+            </a:avLst>
           </a:prstGeom>
           <a:noFill/>
           <a:ln/>
@@ -2861,8 +2911,10 @@
             <a:off x="6541983" y="4228551"/>
             <a:ext cx="266273" cy="266273"/>
           </a:xfrm>
-          <a:prstGeom prst="rect">
-            <a:avLst/>
+          <a:prstGeom prst="roundRect">
+            <a:avLst>
+              <a:gd name="adj" fmla="val 16000"/>
+            </a:avLst>
           </a:prstGeom>
         </p:spPr>
       </p:pic>
@@ -2877,8 +2929,10 @@
             <a:off x="7059168" y="4123944"/>
             <a:ext cx="4416552" cy="457200"/>
           </a:xfrm>
-          <a:prstGeom prst="rect">
-            <a:avLst/>
+          <a:prstGeom prst="roundRect">
+            <a:avLst>
+              <a:gd name="adj" fmla="val 16000"/>
+            </a:avLst>
           </a:prstGeom>
           <a:noFill/>
           <a:ln/>
@@ -2916,8 +2970,10 @@
             <a:off x="6473952" y="4727448"/>
             <a:ext cx="4910328" cy="1234440"/>
           </a:xfrm>
-          <a:prstGeom prst="rect">
-            <a:avLst/>
+          <a:prstGeom prst="roundRect">
+            <a:avLst>
+              <a:gd name="adj" fmla="val 6667"/>
+            </a:avLst>
           </a:prstGeom>
           <a:noFill/>
           <a:ln/>
@@ -2978,8 +3034,10 @@
             <a:off x="548640" y="6455664"/>
             <a:ext cx="8778240" cy="274320"/>
           </a:xfrm>
-          <a:prstGeom prst="rect">
-            <a:avLst/>
+          <a:prstGeom prst="roundRect">
+            <a:avLst>
+              <a:gd name="adj" fmla="val 16000"/>
+            </a:avLst>
           </a:prstGeom>
           <a:noFill/>
           <a:ln/>
@@ -3017,8 +3075,10 @@
             <a:off x="11384280" y="6455664"/>
             <a:ext cx="411480" cy="274320"/>
           </a:xfrm>
-          <a:prstGeom prst="rect">
-            <a:avLst/>
+          <a:prstGeom prst="roundRect">
+            <a:avLst>
+              <a:gd name="adj" fmla="val 16000"/>
+            </a:avLst>
           </a:prstGeom>
           <a:noFill/>
           <a:ln/>
@@ -3096,8 +3156,10 @@
             <a:off x="566928" y="402336"/>
             <a:ext cx="398364" cy="475488"/>
           </a:xfrm>
-          <a:prstGeom prst="rect">
-            <a:avLst/>
+          <a:prstGeom prst="roundRect">
+            <a:avLst>
+              <a:gd name="adj" fmla="val 16000"/>
+            </a:avLst>
           </a:prstGeom>
         </p:spPr>
       </p:pic>
@@ -3112,8 +3174,10 @@
             <a:off x="1024128" y="365760"/>
             <a:ext cx="10607040" cy="548640"/>
           </a:xfrm>
-          <a:prstGeom prst="rect">
-            <a:avLst/>
+          <a:prstGeom prst="roundRect">
+            <a:avLst>
+              <a:gd name="adj" fmla="val 15000"/>
+            </a:avLst>
           </a:prstGeom>
           <a:noFill/>
           <a:ln/>
@@ -3151,8 +3215,10 @@
             <a:off x="1024128" y="950976"/>
             <a:ext cx="10607040" cy="310896"/>
           </a:xfrm>
-          <a:prstGeom prst="rect">
-            <a:avLst/>
+          <a:prstGeom prst="roundRect">
+            <a:avLst>
+              <a:gd name="adj" fmla="val 16000"/>
+            </a:avLst>
           </a:prstGeom>
           <a:noFill/>
           <a:ln/>
@@ -3216,8 +3282,10 @@
             <a:off x="868680" y="1572768"/>
             <a:ext cx="10515600" cy="914400"/>
           </a:xfrm>
-          <a:prstGeom prst="rect">
-            <a:avLst/>
+          <a:prstGeom prst="roundRect">
+            <a:avLst>
+              <a:gd name="adj" fmla="val 9000"/>
+            </a:avLst>
           </a:prstGeom>
           <a:noFill/>
           <a:ln/>
@@ -3283,8 +3351,10 @@
             <a:off x="868680" y="2560320"/>
             <a:ext cx="10515600" cy="292608"/>
           </a:xfrm>
-          <a:prstGeom prst="rect">
-            <a:avLst/>
+          <a:prstGeom prst="roundRect">
+            <a:avLst>
+              <a:gd name="adj" fmla="val 16000"/>
+            </a:avLst>
           </a:prstGeom>
           <a:noFill/>
           <a:ln/>
@@ -3401,8 +3471,10 @@
             <a:off x="1999244" y="3453140"/>
             <a:ext cx="408920" cy="408920"/>
           </a:xfrm>
-          <a:prstGeom prst="rect">
-            <a:avLst/>
+          <a:prstGeom prst="roundRect">
+            <a:avLst>
+              <a:gd name="adj" fmla="val 16000"/>
+            </a:avLst>
           </a:prstGeom>
         </p:spPr>
       </p:pic>
@@ -3417,8 +3489,10 @@
             <a:off x="548640" y="4206240"/>
             <a:ext cx="3310128" cy="457200"/>
           </a:xfrm>
-          <a:prstGeom prst="rect">
-            <a:avLst/>
+          <a:prstGeom prst="roundRect">
+            <a:avLst>
+              <a:gd name="adj" fmla="val 16000"/>
+            </a:avLst>
           </a:prstGeom>
           <a:noFill/>
           <a:ln/>
@@ -3456,8 +3530,10 @@
             <a:off x="822960" y="4718304"/>
             <a:ext cx="2761488" cy="1097280"/>
           </a:xfrm>
-          <a:prstGeom prst="rect">
-            <a:avLst/>
+          <a:prstGeom prst="roundRect">
+            <a:avLst>
+              <a:gd name="adj" fmla="val 7500"/>
+            </a:avLst>
           </a:prstGeom>
           <a:noFill/>
           <a:ln/>
@@ -3563,8 +3639,10 @@
             <a:off x="5876300" y="3453140"/>
             <a:ext cx="408920" cy="408920"/>
           </a:xfrm>
-          <a:prstGeom prst="rect">
-            <a:avLst/>
+          <a:prstGeom prst="roundRect">
+            <a:avLst>
+              <a:gd name="adj" fmla="val 16000"/>
+            </a:avLst>
           </a:prstGeom>
         </p:spPr>
       </p:pic>
@@ -3579,8 +3657,10 @@
             <a:off x="4425696" y="4206240"/>
             <a:ext cx="3310128" cy="457200"/>
           </a:xfrm>
-          <a:prstGeom prst="rect">
-            <a:avLst/>
+          <a:prstGeom prst="roundRect">
+            <a:avLst>
+              <a:gd name="adj" fmla="val 16000"/>
+            </a:avLst>
           </a:prstGeom>
           <a:noFill/>
           <a:ln/>
@@ -3618,8 +3698,10 @@
             <a:off x="4700016" y="4718304"/>
             <a:ext cx="2761488" cy="1097280"/>
           </a:xfrm>
-          <a:prstGeom prst="rect">
-            <a:avLst/>
+          <a:prstGeom prst="roundRect">
+            <a:avLst>
+              <a:gd name="adj" fmla="val 7500"/>
+            </a:avLst>
           </a:prstGeom>
           <a:noFill/>
           <a:ln/>
@@ -3725,8 +3807,10 @@
             <a:off x="9753356" y="3453140"/>
             <a:ext cx="408920" cy="408920"/>
           </a:xfrm>
-          <a:prstGeom prst="rect">
-            <a:avLst/>
+          <a:prstGeom prst="roundRect">
+            <a:avLst>
+              <a:gd name="adj" fmla="val 16000"/>
+            </a:avLst>
           </a:prstGeom>
         </p:spPr>
       </p:pic>
@@ -3741,8 +3825,10 @@
             <a:off x="8302752" y="4206240"/>
             <a:ext cx="3310128" cy="457200"/>
           </a:xfrm>
-          <a:prstGeom prst="rect">
-            <a:avLst/>
+          <a:prstGeom prst="roundRect">
+            <a:avLst>
+              <a:gd name="adj" fmla="val 16000"/>
+            </a:avLst>
           </a:prstGeom>
           <a:noFill/>
           <a:ln/>
@@ -3780,8 +3866,10 @@
             <a:off x="8577072" y="4718304"/>
             <a:ext cx="2761488" cy="1097280"/>
           </a:xfrm>
-          <a:prstGeom prst="rect">
-            <a:avLst/>
+          <a:prstGeom prst="roundRect">
+            <a:avLst>
+              <a:gd name="adj" fmla="val 7500"/>
+            </a:avLst>
           </a:prstGeom>
           <a:noFill/>
           <a:ln/>
@@ -3822,8 +3910,10 @@
             <a:off x="3931920" y="4197096"/>
             <a:ext cx="420624" cy="548640"/>
           </a:xfrm>
-          <a:prstGeom prst="rect">
-            <a:avLst/>
+          <a:prstGeom prst="roundRect">
+            <a:avLst>
+              <a:gd name="adj" fmla="val 16000"/>
+            </a:avLst>
           </a:prstGeom>
           <a:noFill/>
           <a:ln/>
@@ -3858,8 +3948,10 @@
             <a:off x="7808976" y="4197096"/>
             <a:ext cx="420624" cy="548640"/>
           </a:xfrm>
-          <a:prstGeom prst="rect">
-            <a:avLst/>
+          <a:prstGeom prst="roundRect">
+            <a:avLst>
+              <a:gd name="adj" fmla="val 16000"/>
+            </a:avLst>
           </a:prstGeom>
           <a:noFill/>
           <a:ln/>
@@ -3894,8 +3986,10 @@
             <a:off x="548640" y="6455664"/>
             <a:ext cx="8778240" cy="274320"/>
           </a:xfrm>
-          <a:prstGeom prst="rect">
-            <a:avLst/>
+          <a:prstGeom prst="roundRect">
+            <a:avLst>
+              <a:gd name="adj" fmla="val 16000"/>
+            </a:avLst>
           </a:prstGeom>
           <a:noFill/>
           <a:ln/>
@@ -3933,8 +4027,10 @@
             <a:off x="11384280" y="6455664"/>
             <a:ext cx="411480" cy="274320"/>
           </a:xfrm>
-          <a:prstGeom prst="rect">
-            <a:avLst/>
+          <a:prstGeom prst="roundRect">
+            <a:avLst>
+              <a:gd name="adj" fmla="val 16000"/>
+            </a:avLst>
           </a:prstGeom>
           <a:noFill/>
           <a:ln/>
@@ -4012,8 +4108,10 @@
             <a:off x="566928" y="402336"/>
             <a:ext cx="398364" cy="475488"/>
           </a:xfrm>
-          <a:prstGeom prst="rect">
-            <a:avLst/>
+          <a:prstGeom prst="roundRect">
+            <a:avLst>
+              <a:gd name="adj" fmla="val 16000"/>
+            </a:avLst>
           </a:prstGeom>
         </p:spPr>
       </p:pic>
@@ -4028,8 +4126,10 @@
             <a:off x="1024128" y="365760"/>
             <a:ext cx="10607040" cy="548640"/>
           </a:xfrm>
-          <a:prstGeom prst="rect">
-            <a:avLst/>
+          <a:prstGeom prst="roundRect">
+            <a:avLst>
+              <a:gd name="adj" fmla="val 15000"/>
+            </a:avLst>
           </a:prstGeom>
           <a:noFill/>
           <a:ln/>
@@ -4095,8 +4195,10 @@
             <a:off x="1024128" y="950976"/>
             <a:ext cx="10607040" cy="310896"/>
           </a:xfrm>
-          <a:prstGeom prst="rect">
-            <a:avLst/>
+          <a:prstGeom prst="roundRect">
+            <a:avLst>
+              <a:gd name="adj" fmla="val 16000"/>
+            </a:avLst>
           </a:prstGeom>
           <a:noFill/>
           <a:ln/>
@@ -5808,8 +5910,10 @@
             <a:off x="548640" y="5440680"/>
             <a:ext cx="11091672" cy="365760"/>
           </a:xfrm>
-          <a:prstGeom prst="rect">
-            <a:avLst/>
+          <a:prstGeom prst="roundRect">
+            <a:avLst>
+              <a:gd name="adj" fmla="val 16000"/>
+            </a:avLst>
           </a:prstGeom>
           <a:noFill/>
           <a:ln/>
@@ -5847,8 +5951,10 @@
             <a:off x="548640" y="6455664"/>
             <a:ext cx="8778240" cy="274320"/>
           </a:xfrm>
-          <a:prstGeom prst="rect">
-            <a:avLst/>
+          <a:prstGeom prst="roundRect">
+            <a:avLst>
+              <a:gd name="adj" fmla="val 16000"/>
+            </a:avLst>
           </a:prstGeom>
           <a:noFill/>
           <a:ln/>
@@ -5886,8 +5992,10 @@
             <a:off x="11384280" y="6455664"/>
             <a:ext cx="411480" cy="274320"/>
           </a:xfrm>
-          <a:prstGeom prst="rect">
-            <a:avLst/>
+          <a:prstGeom prst="roundRect">
+            <a:avLst>
+              <a:gd name="adj" fmla="val 16000"/>
+            </a:avLst>
           </a:prstGeom>
           <a:noFill/>
           <a:ln/>
@@ -5965,8 +6073,10 @@
             <a:off x="566928" y="402336"/>
             <a:ext cx="398364" cy="475488"/>
           </a:xfrm>
-          <a:prstGeom prst="rect">
-            <a:avLst/>
+          <a:prstGeom prst="roundRect">
+            <a:avLst>
+              <a:gd name="adj" fmla="val 16000"/>
+            </a:avLst>
           </a:prstGeom>
         </p:spPr>
       </p:pic>
@@ -5981,8 +6091,10 @@
             <a:off x="1024128" y="365760"/>
             <a:ext cx="10607040" cy="548640"/>
           </a:xfrm>
-          <a:prstGeom prst="rect">
-            <a:avLst/>
+          <a:prstGeom prst="roundRect">
+            <a:avLst>
+              <a:gd name="adj" fmla="val 15000"/>
+            </a:avLst>
           </a:prstGeom>
           <a:noFill/>
           <a:ln/>
@@ -6048,8 +6160,10 @@
             <a:off x="1024128" y="950976"/>
             <a:ext cx="10607040" cy="310896"/>
           </a:xfrm>
-          <a:prstGeom prst="rect">
-            <a:avLst/>
+          <a:prstGeom prst="roundRect">
+            <a:avLst>
+              <a:gd name="adj" fmla="val 16000"/>
+            </a:avLst>
           </a:prstGeom>
           <a:noFill/>
           <a:ln/>
@@ -7553,8 +7667,10 @@
             <a:off x="872703" y="4914351"/>
             <a:ext cx="266273" cy="266273"/>
           </a:xfrm>
-          <a:prstGeom prst="rect">
-            <a:avLst/>
+          <a:prstGeom prst="roundRect">
+            <a:avLst>
+              <a:gd name="adj" fmla="val 16000"/>
+            </a:avLst>
           </a:prstGeom>
         </p:spPr>
       </p:pic>
@@ -7569,8 +7685,10 @@
             <a:off x="1389888" y="4809744"/>
             <a:ext cx="4416552" cy="457200"/>
           </a:xfrm>
-          <a:prstGeom prst="rect">
-            <a:avLst/>
+          <a:prstGeom prst="roundRect">
+            <a:avLst>
+              <a:gd name="adj" fmla="val 16000"/>
+            </a:avLst>
           </a:prstGeom>
           <a:noFill/>
           <a:ln/>
@@ -7608,8 +7726,10 @@
             <a:off x="804672" y="5413248"/>
             <a:ext cx="4910328" cy="548640"/>
           </a:xfrm>
-          <a:prstGeom prst="rect">
-            <a:avLst/>
+          <a:prstGeom prst="roundRect">
+            <a:avLst>
+              <a:gd name="adj" fmla="val 15000"/>
+            </a:avLst>
           </a:prstGeom>
           <a:noFill/>
           <a:ln/>
@@ -7715,8 +7835,10 @@
             <a:off x="6541983" y="4914351"/>
             <a:ext cx="266273" cy="266273"/>
           </a:xfrm>
-          <a:prstGeom prst="rect">
-            <a:avLst/>
+          <a:prstGeom prst="roundRect">
+            <a:avLst>
+              <a:gd name="adj" fmla="val 16000"/>
+            </a:avLst>
           </a:prstGeom>
         </p:spPr>
       </p:pic>
@@ -7731,8 +7853,10 @@
             <a:off x="7059168" y="4809744"/>
             <a:ext cx="4416552" cy="457200"/>
           </a:xfrm>
-          <a:prstGeom prst="rect">
-            <a:avLst/>
+          <a:prstGeom prst="roundRect">
+            <a:avLst>
+              <a:gd name="adj" fmla="val 16000"/>
+            </a:avLst>
           </a:prstGeom>
           <a:noFill/>
           <a:ln/>
@@ -7770,8 +7894,10 @@
             <a:off x="6473952" y="5413248"/>
             <a:ext cx="4910328" cy="548640"/>
           </a:xfrm>
-          <a:prstGeom prst="rect">
-            <a:avLst/>
+          <a:prstGeom prst="roundRect">
+            <a:avLst>
+              <a:gd name="adj" fmla="val 15000"/>
+            </a:avLst>
           </a:prstGeom>
           <a:noFill/>
           <a:ln/>
@@ -7812,8 +7938,10 @@
             <a:off x="548640" y="6455664"/>
             <a:ext cx="8778240" cy="274320"/>
           </a:xfrm>
-          <a:prstGeom prst="rect">
-            <a:avLst/>
+          <a:prstGeom prst="roundRect">
+            <a:avLst>
+              <a:gd name="adj" fmla="val 16000"/>
+            </a:avLst>
           </a:prstGeom>
           <a:noFill/>
           <a:ln/>
@@ -7851,8 +7979,10 @@
             <a:off x="11384280" y="6455664"/>
             <a:ext cx="411480" cy="274320"/>
           </a:xfrm>
-          <a:prstGeom prst="rect">
-            <a:avLst/>
+          <a:prstGeom prst="roundRect">
+            <a:avLst>
+              <a:gd name="adj" fmla="val 16000"/>
+            </a:avLst>
           </a:prstGeom>
           <a:noFill/>
           <a:ln/>
@@ -7930,8 +8060,10 @@
             <a:off x="566928" y="402336"/>
             <a:ext cx="398364" cy="475488"/>
           </a:xfrm>
-          <a:prstGeom prst="rect">
-            <a:avLst/>
+          <a:prstGeom prst="roundRect">
+            <a:avLst>
+              <a:gd name="adj" fmla="val 16000"/>
+            </a:avLst>
           </a:prstGeom>
         </p:spPr>
       </p:pic>
@@ -7946,8 +8078,10 @@
             <a:off x="1024128" y="365760"/>
             <a:ext cx="10607040" cy="548640"/>
           </a:xfrm>
-          <a:prstGeom prst="rect">
-            <a:avLst/>
+          <a:prstGeom prst="roundRect">
+            <a:avLst>
+              <a:gd name="adj" fmla="val 15000"/>
+            </a:avLst>
           </a:prstGeom>
           <a:noFill/>
           <a:ln/>
@@ -7985,8 +8119,10 @@
             <a:off x="1024128" y="950976"/>
             <a:ext cx="10607040" cy="310896"/>
           </a:xfrm>
-          <a:prstGeom prst="rect">
-            <a:avLst/>
+          <a:prstGeom prst="roundRect">
+            <a:avLst>
+              <a:gd name="adj" fmla="val 16000"/>
+            </a:avLst>
           </a:prstGeom>
           <a:noFill/>
           <a:ln/>
@@ -8089,8 +8225,10 @@
             <a:off x="1097646" y="1948038"/>
             <a:ext cx="218724" cy="218724"/>
           </a:xfrm>
-          <a:prstGeom prst="rect">
-            <a:avLst/>
+          <a:prstGeom prst="roundRect">
+            <a:avLst>
+              <a:gd name="adj" fmla="val 16000"/>
+            </a:avLst>
           </a:prstGeom>
         </p:spPr>
       </p:pic>
@@ -8105,8 +8243,10 @@
             <a:off x="1508760" y="1737360"/>
             <a:ext cx="2560320" cy="640080"/>
           </a:xfrm>
-          <a:prstGeom prst="rect">
-            <a:avLst/>
+          <a:prstGeom prst="roundRect">
+            <a:avLst>
+              <a:gd name="adj" fmla="val 12857"/>
+            </a:avLst>
           </a:prstGeom>
           <a:noFill/>
           <a:ln/>
@@ -8144,8 +8284,10 @@
             <a:off x="4251960" y="1737360"/>
             <a:ext cx="365760" cy="640080"/>
           </a:xfrm>
-          <a:prstGeom prst="rect">
-            <a:avLst/>
+          <a:prstGeom prst="roundRect">
+            <a:avLst>
+              <a:gd name="adj" fmla="val 16000"/>
+            </a:avLst>
           </a:prstGeom>
           <a:noFill/>
           <a:ln/>
@@ -8245,8 +8387,10 @@
             <a:off x="4938126" y="1948038"/>
             <a:ext cx="218724" cy="218724"/>
           </a:xfrm>
-          <a:prstGeom prst="rect">
-            <a:avLst/>
+          <a:prstGeom prst="roundRect">
+            <a:avLst>
+              <a:gd name="adj" fmla="val 16000"/>
+            </a:avLst>
           </a:prstGeom>
         </p:spPr>
       </p:pic>
@@ -8261,8 +8405,10 @@
             <a:off x="5349240" y="1737360"/>
             <a:ext cx="2560320" cy="640080"/>
           </a:xfrm>
-          <a:prstGeom prst="rect">
-            <a:avLst/>
+          <a:prstGeom prst="roundRect">
+            <a:avLst>
+              <a:gd name="adj" fmla="val 12857"/>
+            </a:avLst>
           </a:prstGeom>
           <a:noFill/>
           <a:ln/>
@@ -8300,8 +8446,10 @@
             <a:off x="8092440" y="1737360"/>
             <a:ext cx="365760" cy="640080"/>
           </a:xfrm>
-          <a:prstGeom prst="rect">
-            <a:avLst/>
+          <a:prstGeom prst="roundRect">
+            <a:avLst>
+              <a:gd name="adj" fmla="val 16000"/>
+            </a:avLst>
           </a:prstGeom>
           <a:noFill/>
           <a:ln/>
@@ -8401,8 +8549,10 @@
             <a:off x="8778606" y="1948038"/>
             <a:ext cx="218724" cy="218724"/>
           </a:xfrm>
-          <a:prstGeom prst="rect">
-            <a:avLst/>
+          <a:prstGeom prst="roundRect">
+            <a:avLst>
+              <a:gd name="adj" fmla="val 16000"/>
+            </a:avLst>
           </a:prstGeom>
         </p:spPr>
       </p:pic>
@@ -8417,8 +8567,10 @@
             <a:off x="9189720" y="1737360"/>
             <a:ext cx="2560320" cy="640080"/>
           </a:xfrm>
-          <a:prstGeom prst="rect">
-            <a:avLst/>
+          <a:prstGeom prst="roundRect">
+            <a:avLst>
+              <a:gd name="adj" fmla="val 12857"/>
+            </a:avLst>
           </a:prstGeom>
           <a:noFill/>
           <a:ln/>
@@ -8489,8 +8641,10 @@
             <a:off x="859536" y="3054096"/>
             <a:ext cx="4800600" cy="365760"/>
           </a:xfrm>
-          <a:prstGeom prst="rect">
-            <a:avLst/>
+          <a:prstGeom prst="roundRect">
+            <a:avLst>
+              <a:gd name="adj" fmla="val 16000"/>
+            </a:avLst>
           </a:prstGeom>
           <a:noFill/>
           <a:ln/>
@@ -8542,8 +8696,10 @@
             <a:off x="859536" y="3611880"/>
             <a:ext cx="3959352" cy="402336"/>
           </a:xfrm>
-          <a:prstGeom prst="rect">
-            <a:avLst/>
+          <a:prstGeom prst="roundRect">
+            <a:avLst>
+              <a:gd name="adj" fmla="val 16000"/>
+            </a:avLst>
           </a:prstGeom>
           <a:noFill/>
           <a:ln/>
@@ -8581,8 +8737,10 @@
             <a:off x="4782312" y="3611880"/>
             <a:ext cx="914400" cy="402336"/>
           </a:xfrm>
-          <a:prstGeom prst="rect">
-            <a:avLst/>
+          <a:prstGeom prst="roundRect">
+            <a:avLst>
+              <a:gd name="adj" fmla="val 16000"/>
+            </a:avLst>
           </a:prstGeom>
           <a:noFill/>
           <a:ln/>
@@ -8620,8 +8778,10 @@
             <a:off x="859536" y="4069080"/>
             <a:ext cx="3959352" cy="402336"/>
           </a:xfrm>
-          <a:prstGeom prst="rect">
-            <a:avLst/>
+          <a:prstGeom prst="roundRect">
+            <a:avLst>
+              <a:gd name="adj" fmla="val 16000"/>
+            </a:avLst>
           </a:prstGeom>
           <a:noFill/>
           <a:ln/>
@@ -8659,8 +8819,10 @@
             <a:off x="4782312" y="4069080"/>
             <a:ext cx="914400" cy="402336"/>
           </a:xfrm>
-          <a:prstGeom prst="rect">
-            <a:avLst/>
+          <a:prstGeom prst="roundRect">
+            <a:avLst>
+              <a:gd name="adj" fmla="val 16000"/>
+            </a:avLst>
           </a:prstGeom>
           <a:noFill/>
           <a:ln/>
@@ -8698,8 +8860,10 @@
             <a:off x="859536" y="4526280"/>
             <a:ext cx="3959352" cy="402336"/>
           </a:xfrm>
-          <a:prstGeom prst="rect">
-            <a:avLst/>
+          <a:prstGeom prst="roundRect">
+            <a:avLst>
+              <a:gd name="adj" fmla="val 16000"/>
+            </a:avLst>
           </a:prstGeom>
           <a:noFill/>
           <a:ln/>
@@ -8737,8 +8901,10 @@
             <a:off x="4782312" y="4526280"/>
             <a:ext cx="914400" cy="402336"/>
           </a:xfrm>
-          <a:prstGeom prst="rect">
-            <a:avLst/>
+          <a:prstGeom prst="roundRect">
+            <a:avLst>
+              <a:gd name="adj" fmla="val 16000"/>
+            </a:avLst>
           </a:prstGeom>
           <a:noFill/>
           <a:ln/>
@@ -8776,8 +8942,10 @@
             <a:off x="859536" y="4983480"/>
             <a:ext cx="3959352" cy="402336"/>
           </a:xfrm>
-          <a:prstGeom prst="rect">
-            <a:avLst/>
+          <a:prstGeom prst="roundRect">
+            <a:avLst>
+              <a:gd name="adj" fmla="val 16000"/>
+            </a:avLst>
           </a:prstGeom>
           <a:noFill/>
           <a:ln/>
@@ -8815,8 +8983,10 @@
             <a:off x="4782312" y="4983480"/>
             <a:ext cx="914400" cy="402336"/>
           </a:xfrm>
-          <a:prstGeom prst="rect">
-            <a:avLst/>
+          <a:prstGeom prst="roundRect">
+            <a:avLst>
+              <a:gd name="adj" fmla="val 16000"/>
+            </a:avLst>
           </a:prstGeom>
           <a:noFill/>
           <a:ln/>
@@ -8919,8 +9089,10 @@
             <a:off x="6541983" y="3176991"/>
             <a:ext cx="266273" cy="266273"/>
           </a:xfrm>
-          <a:prstGeom prst="rect">
-            <a:avLst/>
+          <a:prstGeom prst="roundRect">
+            <a:avLst>
+              <a:gd name="adj" fmla="val 16000"/>
+            </a:avLst>
           </a:prstGeom>
         </p:spPr>
       </p:pic>
@@ -8935,8 +9107,10 @@
             <a:off x="7059168" y="3072384"/>
             <a:ext cx="4416552" cy="457200"/>
           </a:xfrm>
-          <a:prstGeom prst="rect">
-            <a:avLst/>
+          <a:prstGeom prst="roundRect">
+            <a:avLst>
+              <a:gd name="adj" fmla="val 16000"/>
+            </a:avLst>
           </a:prstGeom>
           <a:noFill/>
           <a:ln/>
@@ -8974,8 +9148,10 @@
             <a:off x="6473952" y="3675888"/>
             <a:ext cx="4910328" cy="1737360"/>
           </a:xfrm>
-          <a:prstGeom prst="rect">
-            <a:avLst/>
+          <a:prstGeom prst="roundRect">
+            <a:avLst>
+              <a:gd name="adj" fmla="val 4737"/>
+            </a:avLst>
           </a:prstGeom>
           <a:noFill/>
           <a:ln/>
@@ -9036,8 +9212,10 @@
             <a:off x="548640" y="6455664"/>
             <a:ext cx="8778240" cy="274320"/>
           </a:xfrm>
-          <a:prstGeom prst="rect">
-            <a:avLst/>
+          <a:prstGeom prst="roundRect">
+            <a:avLst>
+              <a:gd name="adj" fmla="val 16000"/>
+            </a:avLst>
           </a:prstGeom>
           <a:noFill/>
           <a:ln/>
@@ -9075,8 +9253,10 @@
             <a:off x="11384280" y="6455664"/>
             <a:ext cx="411480" cy="274320"/>
           </a:xfrm>
-          <a:prstGeom prst="rect">
-            <a:avLst/>
+          <a:prstGeom prst="roundRect">
+            <a:avLst>
+              <a:gd name="adj" fmla="val 16000"/>
+            </a:avLst>
           </a:prstGeom>
           <a:noFill/>
           <a:ln/>
@@ -9154,8 +9334,10 @@
             <a:off x="566928" y="402336"/>
             <a:ext cx="398364" cy="475488"/>
           </a:xfrm>
-          <a:prstGeom prst="rect">
-            <a:avLst/>
+          <a:prstGeom prst="roundRect">
+            <a:avLst>
+              <a:gd name="adj" fmla="val 16000"/>
+            </a:avLst>
           </a:prstGeom>
         </p:spPr>
       </p:pic>
@@ -9170,8 +9352,10 @@
             <a:off x="1024128" y="365760"/>
             <a:ext cx="10607040" cy="548640"/>
           </a:xfrm>
-          <a:prstGeom prst="rect">
-            <a:avLst/>
+          <a:prstGeom prst="roundRect">
+            <a:avLst>
+              <a:gd name="adj" fmla="val 15000"/>
+            </a:avLst>
           </a:prstGeom>
           <a:noFill/>
           <a:ln/>
@@ -9209,8 +9393,10 @@
             <a:off x="1024128" y="950976"/>
             <a:ext cx="10607040" cy="310896"/>
           </a:xfrm>
-          <a:prstGeom prst="rect">
-            <a:avLst/>
+          <a:prstGeom prst="roundRect">
+            <a:avLst>
+              <a:gd name="adj" fmla="val 16000"/>
+            </a:avLst>
           </a:prstGeom>
           <a:noFill/>
           <a:ln/>
@@ -9313,8 +9499,10 @@
             <a:off x="2118482" y="2063618"/>
             <a:ext cx="389900" cy="389900"/>
           </a:xfrm>
-          <a:prstGeom prst="rect">
-            <a:avLst/>
+          <a:prstGeom prst="roundRect">
+            <a:avLst>
+              <a:gd name="adj" fmla="val 16000"/>
+            </a:avLst>
           </a:prstGeom>
         </p:spPr>
       </p:pic>
@@ -9329,8 +9517,10 @@
             <a:off x="548640" y="2788920"/>
             <a:ext cx="3529584" cy="457200"/>
           </a:xfrm>
-          <a:prstGeom prst="rect">
-            <a:avLst/>
+          <a:prstGeom prst="roundRect">
+            <a:avLst>
+              <a:gd name="adj" fmla="val 16000"/>
+            </a:avLst>
           </a:prstGeom>
           <a:noFill/>
           <a:ln/>
@@ -9368,8 +9558,10 @@
             <a:off x="841248" y="3300984"/>
             <a:ext cx="2944368" cy="914400"/>
           </a:xfrm>
-          <a:prstGeom prst="rect">
-            <a:avLst/>
+          <a:prstGeom prst="roundRect">
+            <a:avLst>
+              <a:gd name="adj" fmla="val 9000"/>
+            </a:avLst>
           </a:prstGeom>
           <a:noFill/>
           <a:ln/>
@@ -9475,8 +9667,10 @@
             <a:off x="5894954" y="2063618"/>
             <a:ext cx="389900" cy="389900"/>
           </a:xfrm>
-          <a:prstGeom prst="rect">
-            <a:avLst/>
+          <a:prstGeom prst="roundRect">
+            <a:avLst>
+              <a:gd name="adj" fmla="val 16000"/>
+            </a:avLst>
           </a:prstGeom>
         </p:spPr>
       </p:pic>
@@ -9491,8 +9685,10 @@
             <a:off x="4325112" y="2788920"/>
             <a:ext cx="3529584" cy="457200"/>
           </a:xfrm>
-          <a:prstGeom prst="rect">
-            <a:avLst/>
+          <a:prstGeom prst="roundRect">
+            <a:avLst>
+              <a:gd name="adj" fmla="val 16000"/>
+            </a:avLst>
           </a:prstGeom>
           <a:noFill/>
           <a:ln/>
@@ -9530,8 +9726,10 @@
             <a:off x="4617720" y="3300984"/>
             <a:ext cx="2944368" cy="914400"/>
           </a:xfrm>
-          <a:prstGeom prst="rect">
-            <a:avLst/>
+          <a:prstGeom prst="roundRect">
+            <a:avLst>
+              <a:gd name="adj" fmla="val 9000"/>
+            </a:avLst>
           </a:prstGeom>
           <a:noFill/>
           <a:ln/>
@@ -9637,8 +9835,10 @@
             <a:off x="9671426" y="2063618"/>
             <a:ext cx="389900" cy="389900"/>
           </a:xfrm>
-          <a:prstGeom prst="rect">
-            <a:avLst/>
+          <a:prstGeom prst="roundRect">
+            <a:avLst>
+              <a:gd name="adj" fmla="val 16000"/>
+            </a:avLst>
           </a:prstGeom>
         </p:spPr>
       </p:pic>
@@ -9653,8 +9853,10 @@
             <a:off x="8101584" y="2788920"/>
             <a:ext cx="3529584" cy="457200"/>
           </a:xfrm>
-          <a:prstGeom prst="rect">
-            <a:avLst/>
+          <a:prstGeom prst="roundRect">
+            <a:avLst>
+              <a:gd name="adj" fmla="val 16000"/>
+            </a:avLst>
           </a:prstGeom>
           <a:noFill/>
           <a:ln/>
@@ -9692,8 +9894,10 @@
             <a:off x="8394192" y="3300984"/>
             <a:ext cx="2944368" cy="914400"/>
           </a:xfrm>
-          <a:prstGeom prst="rect">
-            <a:avLst/>
+          <a:prstGeom prst="roundRect">
+            <a:avLst>
+              <a:gd name="adj" fmla="val 9000"/>
+            </a:avLst>
           </a:prstGeom>
           <a:noFill/>
           <a:ln/>
@@ -9760,8 +9964,10 @@
             <a:off x="868680" y="4617720"/>
             <a:ext cx="10515600" cy="1051560"/>
           </a:xfrm>
-          <a:prstGeom prst="rect">
-            <a:avLst/>
+          <a:prstGeom prst="roundRect">
+            <a:avLst>
+              <a:gd name="adj" fmla="val 7826"/>
+            </a:avLst>
           </a:prstGeom>
           <a:noFill/>
           <a:ln/>
@@ -9870,8 +10076,10 @@
             <a:off x="548640" y="6455664"/>
             <a:ext cx="8778240" cy="274320"/>
           </a:xfrm>
-          <a:prstGeom prst="rect">
-            <a:avLst/>
+          <a:prstGeom prst="roundRect">
+            <a:avLst>
+              <a:gd name="adj" fmla="val 16000"/>
+            </a:avLst>
           </a:prstGeom>
           <a:noFill/>
           <a:ln/>
@@ -9909,8 +10117,10 @@
             <a:off x="11384280" y="6455664"/>
             <a:ext cx="411480" cy="274320"/>
           </a:xfrm>
-          <a:prstGeom prst="rect">
-            <a:avLst/>
+          <a:prstGeom prst="roundRect">
+            <a:avLst>
+              <a:gd name="adj" fmla="val 16000"/>
+            </a:avLst>
           </a:prstGeom>
           <a:noFill/>
           <a:ln/>
